--- a/presentation/presentation_updated.pptx
+++ b/presentation/presentation_updated.pptx
@@ -3,7 +3,7 @@
 <Properties xmlns="http://schemas.openxmlformats.org/officeDocument/2006/extended-properties" xmlns:vt="http://schemas.openxmlformats.org/officeDocument/2006/docPropsVTypes">
   <Application>docs-hub generator</Application>
   <PresentationFormat>Widescreen</PresentationFormat>
-  <Slides>8</Slides>
+  <Slides>9</Slides>
 </Properties>
 </file>
 
@@ -31,6 +31,7 @@
     <p:sldId id="261" r:id="rId7"/>
     <p:sldId id="262" r:id="rId8"/>
     <p:sldId id="263" r:id="rId9"/>
+    <p:sldId id="264" r:id="rId10"/>
   </p:sldIdLst>
   <p:sldSz cx="12191695" cy="6858000" type="wide"/>
   <p:notesSz cx="6858000" cy="9144000"/>
@@ -7568,6 +7569,821 @@
 </p:sld>
 </file>
 
+<file path=ppt\slides\slide9.xml><?xml version="1.0" encoding="utf-8"?>
+<p:sld xmlns:a="http://schemas.openxmlformats.org/drawingml/2006/main" xmlns:r="http://schemas.openxmlformats.org/officeDocument/2006/relationships" xmlns:p="http://schemas.openxmlformats.org/presentationml/2006/main">
+  <p:cSld>
+    <p:bg>
+      <p:bgPr>
+        <a:solidFill>
+          <a:srgbClr val="F7F8F5"/>
+        </a:solidFill>
+        <a:effectLst/>
+      </p:bgPr>
+    </p:bg>
+    <p:spTree>
+      <p:nvGrpSpPr>
+        <p:cNvPr id="1" name=""/>
+        <p:cNvGrpSpPr/>
+        <p:nvPr/>
+      </p:nvGrpSpPr>
+      <p:grpSpPr>
+        <a:xfrm>
+          <a:off x="0" y="0"/>
+          <a:ext cx="0" cy="0"/>
+          <a:chOff x="0" y="0"/>
+          <a:chExt cx="0" cy="0"/>
+        </a:xfrm>
+      </p:grpSpPr>
+      <p:sp>
+        <p:nvSpPr>
+          <p:cNvPr id="2" name="background"/>
+          <p:cNvSpPr/>
+          <p:nvPr/>
+        </p:nvSpPr>
+        <p:spPr>
+          <a:xfrm>
+            <a:off x="0" y="0"/>
+            <a:ext cx="12191695" cy="6858000"/>
+          </a:xfrm>
+          <a:prstGeom prst="rect">
+            <a:avLst/>
+          </a:prstGeom>
+          <a:solidFill>
+            <a:srgbClr val="F7F8F5"/>
+          </a:solidFill>
+          <a:ln w="9525">
+            <a:solidFill>
+              <a:srgbClr val=""/>
+            </a:solidFill>
+          </a:ln>
+        </p:spPr>
+      </p:sp>
+      <p:sp>
+        <p:nvSpPr>
+          <p:cNvPr id="3" name="accent bar"/>
+          <p:cNvSpPr/>
+          <p:nvPr/>
+        </p:nvSpPr>
+        <p:spPr>
+          <a:xfrm>
+            <a:off x="0" y="0"/>
+            <a:ext cx="146304" cy="6858000"/>
+          </a:xfrm>
+          <a:prstGeom prst="rect">
+            <a:avLst/>
+          </a:prstGeom>
+          <a:solidFill>
+            <a:srgbClr val="0F6B5F"/>
+          </a:solidFill>
+          <a:ln w="9525">
+            <a:solidFill>
+              <a:srgbClr val=""/>
+            </a:solidFill>
+          </a:ln>
+        </p:spPr>
+      </p:sp>
+      <p:sp>
+        <p:nvSpPr>
+          <p:cNvPr id="4" name="section mark"/>
+          <p:cNvSpPr/>
+          <p:nvPr/>
+        </p:nvSpPr>
+        <p:spPr>
+          <a:xfrm>
+            <a:off x="621792" y="502920"/>
+            <a:ext cx="502920" cy="109728"/>
+          </a:xfrm>
+          <a:prstGeom prst="roundRect">
+            <a:avLst/>
+          </a:prstGeom>
+          <a:solidFill>
+            <a:srgbClr val="D99A2B"/>
+          </a:solidFill>
+          <a:ln w="9525">
+            <a:solidFill>
+              <a:srgbClr val=""/>
+            </a:solidFill>
+          </a:ln>
+        </p:spPr>
+      </p:sp>
+      <p:sp>
+        <p:nvSpPr>
+          <p:cNvPr id="5" name="slide label"/>
+          <p:cNvSpPr/>
+          <p:nvPr/>
+        </p:nvSpPr>
+        <p:spPr>
+          <a:xfrm>
+            <a:off x="621792" y="704088"/>
+            <a:ext cx="2880360" cy="219456"/>
+          </a:xfrm>
+          <a:prstGeom prst="rect">
+            <a:avLst/>
+          </a:prstGeom>
+          <a:solidFill>
+            <a:srgbClr val=""/>
+          </a:solidFill>
+          <a:ln w="9525">
+            <a:solidFill>
+              <a:srgbClr val=""/>
+            </a:solidFill>
+          </a:ln>
+        </p:spPr>
+        <p:txBody>
+          <a:bodyPr wrap="square" anchor="t" lIns="54864" tIns="54864" rIns="54864" bIns="54864">
+            <a:spAutoFit/>
+          </a:bodyPr>
+          <a:lstStyle/>
+          <a:p>
+            <a:pPr algn="l"/>
+            <a:r>
+              <a:rPr lang="ru-RU" sz="1000" b="1">
+                <a:solidFill>
+                  <a:srgbClr val="0F6B5F"/>
+                </a:solidFill>
+                <a:latin typeface="Aptos"/>
+                <a:cs typeface="Aptos"/>
+              </a:rPr>
+              <a:t>OpenSpec adaptation · 09</a:t>
+            </a:r>
+            <a:endParaRPr lang="ru-RU" sz="1000"/>
+          </a:p>
+        </p:txBody>
+      </p:sp>
+      <p:sp>
+        <p:nvSpPr>
+          <p:cNvPr id="6" name="title"/>
+          <p:cNvSpPr/>
+          <p:nvPr/>
+        </p:nvSpPr>
+        <p:spPr>
+          <a:xfrm>
+            <a:off x="621792" y="1060704"/>
+            <a:ext cx="7223760" cy="566928"/>
+          </a:xfrm>
+          <a:prstGeom prst="rect">
+            <a:avLst/>
+          </a:prstGeom>
+          <a:solidFill>
+            <a:srgbClr val=""/>
+          </a:solidFill>
+          <a:ln w="9525">
+            <a:solidFill>
+              <a:srgbClr val=""/>
+            </a:solidFill>
+          </a:ln>
+        </p:spPr>
+        <p:txBody>
+          <a:bodyPr wrap="square" anchor="t" lIns="54864" tIns="54864" rIns="54864" bIns="54864">
+            <a:spAutoFit/>
+          </a:bodyPr>
+          <a:lstStyle/>
+          <a:p>
+            <a:pPr algn="l"/>
+            <a:r>
+              <a:rPr lang="ru-RU" sz="3200" b="1">
+                <a:solidFill>
+                  <a:srgbClr val="18212B"/>
+                </a:solidFill>
+                <a:latin typeface="Aptos"/>
+                <a:cs typeface="Aptos"/>
+              </a:rPr>
+              <a:t>Мастер-спецификация сервиса</a:t>
+            </a:r>
+            <a:endParaRPr lang="ru-RU" sz="3200"/>
+          </a:p>
+        </p:txBody>
+      </p:sp>
+      <p:sp>
+        <p:nvSpPr>
+          <p:cNvPr id="7" name="subtitle"/>
+          <p:cNvSpPr/>
+          <p:nvPr/>
+        </p:nvSpPr>
+        <p:spPr>
+          <a:xfrm>
+            <a:off x="640080" y="1673352"/>
+            <a:ext cx="7589520" cy="310896"/>
+          </a:xfrm>
+          <a:prstGeom prst="rect">
+            <a:avLst/>
+          </a:prstGeom>
+          <a:solidFill>
+            <a:srgbClr val=""/>
+          </a:solidFill>
+          <a:ln w="9525">
+            <a:solidFill>
+              <a:srgbClr val=""/>
+            </a:solidFill>
+          </a:ln>
+        </p:spPr>
+        <p:txBody>
+          <a:bodyPr wrap="square" anchor="t" lIns="54864" tIns="54864" rIns="54864" bIns="54864">
+            <a:spAutoFit/>
+          </a:bodyPr>
+          <a:lstStyle/>
+          <a:p>
+            <a:pPr algn="l"/>
+            <a:r>
+              <a:rPr lang="ru-RU" sz="1250">
+                <a:solidFill>
+                  <a:srgbClr val="3E4756"/>
+                </a:solidFill>
+                <a:latin typeface="Aptos"/>
+                <a:cs typeface="Aptos"/>
+              </a:rPr>
+              <a:t>Единая схема связывает сервис с процессами, интеграциями, данными, UI и обработчиками действий</a:t>
+            </a:r>
+            <a:endParaRPr lang="ru-RU" sz="1250"/>
+          </a:p>
+        </p:txBody>
+      </p:sp>
+      <p:sp>
+        <p:nvSpPr>
+          <p:cNvPr id="8" name="service node"/>
+          <p:cNvSpPr/>
+          <p:nvPr/>
+        </p:nvSpPr>
+        <p:spPr>
+          <a:xfrm>
+            <a:off x="3886200" y="2084832"/>
+            <a:ext cx="4434840" cy="658368"/>
+          </a:xfrm>
+          <a:prstGeom prst="roundRect">
+            <a:avLst/>
+          </a:prstGeom>
+          <a:solidFill>
+            <a:srgbClr val="0F6B5F"/>
+          </a:solidFill>
+          <a:ln w="9525">
+            <a:solidFill>
+              <a:srgbClr val="0F6B5F"/>
+            </a:solidFill>
+          </a:ln>
+        </p:spPr>
+        <p:txBody>
+          <a:bodyPr wrap="square" anchor="mid" lIns="54864" tIns="54864" rIns="54864" bIns="54864">
+            <a:spAutoFit/>
+          </a:bodyPr>
+          <a:lstStyle/>
+          <a:p>
+            <a:pPr algn="ctr"/>
+            <a:r>
+              <a:rPr lang="ru-RU" sz="2250" b="1">
+                <a:solidFill>
+                  <a:srgbClr val="FFFFFF"/>
+                </a:solidFill>
+                <a:latin typeface="Aptos"/>
+                <a:cs typeface="Aptos"/>
+              </a:rPr>
+              <a:t>Сервис</a:t>
+            </a:r>
+            <a:endParaRPr lang="ru-RU" sz="2250"/>
+          </a:p>
+        </p:txBody>
+      </p:sp>
+      <p:sp>
+        <p:nvSpPr>
+          <p:cNvPr id="9" name="connector trunk"/>
+          <p:cNvSpPr/>
+          <p:nvPr/>
+        </p:nvSpPr>
+        <p:spPr>
+          <a:xfrm>
+            <a:off x="6080760" y="2743200"/>
+            <a:ext cx="54864" cy="301752"/>
+          </a:xfrm>
+          <a:prstGeom prst="rect">
+            <a:avLst/>
+          </a:prstGeom>
+          <a:solidFill>
+            <a:srgbClr val="0F6B5F"/>
+          </a:solidFill>
+          <a:ln w="9525">
+            <a:solidFill>
+              <a:srgbClr val=""/>
+            </a:solidFill>
+          </a:ln>
+        </p:spPr>
+      </p:sp>
+      <p:sp>
+        <p:nvSpPr>
+          <p:cNvPr id="10" name="connector bus"/>
+          <p:cNvSpPr/>
+          <p:nvPr/>
+        </p:nvSpPr>
+        <p:spPr>
+          <a:xfrm>
+            <a:off x="2072488" y="3026664"/>
+            <a:ext cx="8046720" cy="45720"/>
+          </a:xfrm>
+          <a:prstGeom prst="rect">
+            <a:avLst/>
+          </a:prstGeom>
+          <a:solidFill>
+            <a:srgbClr val="0F6B5F"/>
+          </a:solidFill>
+          <a:ln w="9525">
+            <a:solidFill>
+              <a:srgbClr val=""/>
+            </a:solidFill>
+          </a:ln>
+        </p:spPr>
+      </p:sp>
+      <p:sp>
+        <p:nvSpPr>
+          <p:cNvPr id="11" name="down arrow 1"/>
+          <p:cNvSpPr/>
+          <p:nvPr/>
+        </p:nvSpPr>
+        <p:spPr>
+          <a:xfrm>
+            <a:off x="1953616" y="3099816"/>
+            <a:ext cx="237744" cy="512064"/>
+          </a:xfrm>
+          <a:prstGeom prst="downArrow">
+            <a:avLst/>
+          </a:prstGeom>
+          <a:solidFill>
+            <a:srgbClr val="0F6B5F"/>
+          </a:solidFill>
+          <a:ln w="9525">
+            <a:solidFill>
+              <a:srgbClr val=""/>
+            </a:solidFill>
+          </a:ln>
+        </p:spPr>
+      </p:sp>
+      <p:sp>
+        <p:nvSpPr>
+          <p:cNvPr id="12" name="down arrow 2"/>
+          <p:cNvSpPr/>
+          <p:nvPr/>
+        </p:nvSpPr>
+        <p:spPr>
+          <a:xfrm>
+            <a:off x="3965296" y="3099816"/>
+            <a:ext cx="237744" cy="512064"/>
+          </a:xfrm>
+          <a:prstGeom prst="downArrow">
+            <a:avLst/>
+          </a:prstGeom>
+          <a:solidFill>
+            <a:srgbClr val="0F6B5F"/>
+          </a:solidFill>
+          <a:ln w="9525">
+            <a:solidFill>
+              <a:srgbClr val=""/>
+            </a:solidFill>
+          </a:ln>
+        </p:spPr>
+      </p:sp>
+      <p:sp>
+        <p:nvSpPr>
+          <p:cNvPr id="13" name="down arrow 3"/>
+          <p:cNvSpPr/>
+          <p:nvPr/>
+        </p:nvSpPr>
+        <p:spPr>
+          <a:xfrm>
+            <a:off x="5976976" y="3099816"/>
+            <a:ext cx="237744" cy="512064"/>
+          </a:xfrm>
+          <a:prstGeom prst="downArrow">
+            <a:avLst/>
+          </a:prstGeom>
+          <a:solidFill>
+            <a:srgbClr val="0F6B5F"/>
+          </a:solidFill>
+          <a:ln w="9525">
+            <a:solidFill>
+              <a:srgbClr val=""/>
+            </a:solidFill>
+          </a:ln>
+        </p:spPr>
+      </p:sp>
+      <p:sp>
+        <p:nvSpPr>
+          <p:cNvPr id="14" name="down arrow 4"/>
+          <p:cNvSpPr/>
+          <p:nvPr/>
+        </p:nvSpPr>
+        <p:spPr>
+          <a:xfrm>
+            <a:off x="7988656" y="3099816"/>
+            <a:ext cx="237744" cy="512064"/>
+          </a:xfrm>
+          <a:prstGeom prst="downArrow">
+            <a:avLst/>
+          </a:prstGeom>
+          <a:solidFill>
+            <a:srgbClr val="0F6B5F"/>
+          </a:solidFill>
+          <a:ln w="9525">
+            <a:solidFill>
+              <a:srgbClr val=""/>
+            </a:solidFill>
+          </a:ln>
+        </p:spPr>
+      </p:sp>
+      <p:sp>
+        <p:nvSpPr>
+          <p:cNvPr id="15" name="down arrow 5"/>
+          <p:cNvSpPr/>
+          <p:nvPr/>
+        </p:nvSpPr>
+        <p:spPr>
+          <a:xfrm>
+            <a:off x="10000336" y="3099816"/>
+            <a:ext cx="237744" cy="512064"/>
+          </a:xfrm>
+          <a:prstGeom prst="downArrow">
+            <a:avLst/>
+          </a:prstGeom>
+          <a:solidFill>
+            <a:srgbClr val="0F6B5F"/>
+          </a:solidFill>
+          <a:ln w="9525">
+            <a:solidFill>
+              <a:srgbClr val=""/>
+            </a:solidFill>
+          </a:ln>
+        </p:spPr>
+      </p:sp>
+      <p:sp>
+        <p:nvSpPr>
+          <p:cNvPr id="16" name="artifact card 1"/>
+          <p:cNvSpPr/>
+          <p:nvPr/>
+        </p:nvSpPr>
+        <p:spPr>
+          <a:xfrm>
+            <a:off x="1180948" y="3730752"/>
+            <a:ext cx="1783080" cy="1417320"/>
+          </a:xfrm>
+          <a:prstGeom prst="roundRect">
+            <a:avLst/>
+          </a:prstGeom>
+          <a:solidFill>
+            <a:srgbClr val="FFFFFF"/>
+          </a:solidFill>
+          <a:ln w="9525">
+            <a:solidFill>
+              <a:srgbClr val="0F6B5F"/>
+            </a:solidFill>
+          </a:ln>
+        </p:spPr>
+        <p:txBody>
+          <a:bodyPr wrap="square" anchor="mid" lIns="91440" tIns="91440" rIns="91440" bIns="91440">
+            <a:spAutoFit/>
+          </a:bodyPr>
+          <a:lstStyle/>
+          <a:p>
+            <a:pPr algn="ctr"/>
+            <a:r>
+              <a:rPr lang="ru-RU" sz="1080" b="1">
+                <a:solidFill>
+                  <a:srgbClr val="18212B"/>
+                </a:solidFill>
+                <a:latin typeface="Aptos"/>
+                <a:cs typeface="Aptos"/>
+              </a:rPr>
+              <a:t>Бизнес-процессы</a:t>
+            </a:r>
+            <a:endParaRPr lang="ru-RU" sz="1080"/>
+          </a:p>
+          <a:p>
+            <a:pPr algn="ctr"/>
+            <a:r>
+              <a:rPr lang="ru-RU" sz="1900" b="1">
+                <a:solidFill>
+                  <a:srgbClr val="0F6B5F"/>
+                </a:solidFill>
+                <a:latin typeface="Aptos"/>
+                <a:cs typeface="Aptos"/>
+              </a:rPr>
+              <a:t>80+ шт</a:t>
+            </a:r>
+            <a:endParaRPr lang="ru-RU" sz="1900"/>
+          </a:p>
+          <a:p>
+            <a:pPr algn="ctr"/>
+            <a:r>
+              <a:rPr lang="ru-RU" sz="820" b="1">
+                <a:solidFill>
+                  <a:srgbClr val="3E4756"/>
+                </a:solidFill>
+                <a:latin typeface="Aptos"/>
+                <a:cs typeface="Aptos"/>
+              </a:rPr>
+              <a:t>5+ шагов в каждом</a:t>
+            </a:r>
+            <a:endParaRPr lang="ru-RU" sz="820"/>
+          </a:p>
+        </p:txBody>
+      </p:sp>
+      <p:sp>
+        <p:nvSpPr>
+          <p:cNvPr id="17" name="artifact card 2"/>
+          <p:cNvSpPr/>
+          <p:nvPr/>
+        </p:nvSpPr>
+        <p:spPr>
+          <a:xfrm>
+            <a:off x="3192628" y="3730752"/>
+            <a:ext cx="1783080" cy="1417320"/>
+          </a:xfrm>
+          <a:prstGeom prst="roundRect">
+            <a:avLst/>
+          </a:prstGeom>
+          <a:solidFill>
+            <a:srgbClr val="FFFFFF"/>
+          </a:solidFill>
+          <a:ln w="9525">
+            <a:solidFill>
+              <a:srgbClr val="D8DEDA"/>
+            </a:solidFill>
+          </a:ln>
+        </p:spPr>
+        <p:txBody>
+          <a:bodyPr wrap="square" anchor="mid" lIns="91440" tIns="91440" rIns="91440" bIns="91440">
+            <a:spAutoFit/>
+          </a:bodyPr>
+          <a:lstStyle/>
+          <a:p>
+            <a:pPr algn="ctr"/>
+            <a:r>
+              <a:rPr lang="ru-RU" sz="1120" b="1">
+                <a:solidFill>
+                  <a:srgbClr val="18212B"/>
+                </a:solidFill>
+                <a:latin typeface="Aptos"/>
+                <a:cs typeface="Aptos"/>
+              </a:rPr>
+              <a:t>Интеграции</a:t>
+            </a:r>
+            <a:endParaRPr lang="ru-RU" sz="1120"/>
+          </a:p>
+          <a:p>
+            <a:pPr algn="ctr"/>
+            <a:r>
+              <a:rPr lang="ru-RU" sz="2100" b="1">
+                <a:solidFill>
+                  <a:srgbClr val="0F6B5F"/>
+                </a:solidFill>
+                <a:latin typeface="Aptos"/>
+                <a:cs typeface="Aptos"/>
+              </a:rPr>
+              <a:t>15+</a:t>
+            </a:r>
+            <a:endParaRPr lang="ru-RU" sz="2100"/>
+          </a:p>
+        </p:txBody>
+      </p:sp>
+      <p:sp>
+        <p:nvSpPr>
+          <p:cNvPr id="18" name="artifact card 3"/>
+          <p:cNvSpPr/>
+          <p:nvPr/>
+        </p:nvSpPr>
+        <p:spPr>
+          <a:xfrm>
+            <a:off x="5204308" y="3730752"/>
+            <a:ext cx="1783080" cy="1417320"/>
+          </a:xfrm>
+          <a:prstGeom prst="roundRect">
+            <a:avLst/>
+          </a:prstGeom>
+          <a:solidFill>
+            <a:srgbClr val="FFFFFF"/>
+          </a:solidFill>
+          <a:ln w="9525">
+            <a:solidFill>
+              <a:srgbClr val="D8DEDA"/>
+            </a:solidFill>
+          </a:ln>
+        </p:spPr>
+        <p:txBody>
+          <a:bodyPr wrap="square" anchor="mid" lIns="91440" tIns="91440" rIns="91440" bIns="91440">
+            <a:spAutoFit/>
+          </a:bodyPr>
+          <a:lstStyle/>
+          <a:p>
+            <a:pPr algn="ctr"/>
+            <a:r>
+              <a:rPr lang="ru-RU" sz="1120" b="1">
+                <a:solidFill>
+                  <a:srgbClr val="18212B"/>
+                </a:solidFill>
+                <a:latin typeface="Aptos"/>
+                <a:cs typeface="Aptos"/>
+              </a:rPr>
+              <a:t>Справочники</a:t>
+            </a:r>
+            <a:endParaRPr lang="ru-RU" sz="1120"/>
+          </a:p>
+          <a:p>
+            <a:pPr algn="ctr"/>
+            <a:r>
+              <a:rPr lang="ru-RU" sz="2100" b="1">
+                <a:solidFill>
+                  <a:srgbClr val="0F6B5F"/>
+                </a:solidFill>
+                <a:latin typeface="Aptos"/>
+                <a:cs typeface="Aptos"/>
+              </a:rPr>
+              <a:t>50+</a:t>
+            </a:r>
+            <a:endParaRPr lang="ru-RU" sz="2100"/>
+          </a:p>
+        </p:txBody>
+      </p:sp>
+      <p:sp>
+        <p:nvSpPr>
+          <p:cNvPr id="19" name="artifact card 4"/>
+          <p:cNvSpPr/>
+          <p:nvPr/>
+        </p:nvSpPr>
+        <p:spPr>
+          <a:xfrm>
+            <a:off x="7215988" y="3730752"/>
+            <a:ext cx="1783080" cy="1417320"/>
+          </a:xfrm>
+          <a:prstGeom prst="roundRect">
+            <a:avLst/>
+          </a:prstGeom>
+          <a:solidFill>
+            <a:srgbClr val="FFFFFF"/>
+          </a:solidFill>
+          <a:ln w="9525">
+            <a:solidFill>
+              <a:srgbClr val="D8DEDA"/>
+            </a:solidFill>
+          </a:ln>
+        </p:spPr>
+        <p:txBody>
+          <a:bodyPr wrap="square" anchor="mid" lIns="91440" tIns="91440" rIns="91440" bIns="91440">
+            <a:spAutoFit/>
+          </a:bodyPr>
+          <a:lstStyle/>
+          <a:p>
+            <a:pPr algn="ctr"/>
+            <a:r>
+              <a:rPr lang="ru-RU" sz="1120" b="1">
+                <a:solidFill>
+                  <a:srgbClr val="18212B"/>
+                </a:solidFill>
+                <a:latin typeface="Aptos"/>
+                <a:cs typeface="Aptos"/>
+              </a:rPr>
+              <a:t>Формы UI</a:t>
+            </a:r>
+            <a:endParaRPr lang="ru-RU" sz="1120"/>
+          </a:p>
+          <a:p>
+            <a:pPr algn="ctr"/>
+            <a:r>
+              <a:rPr lang="ru-RU" sz="2100" b="1">
+                <a:solidFill>
+                  <a:srgbClr val="0F6B5F"/>
+                </a:solidFill>
+                <a:latin typeface="Aptos"/>
+                <a:cs typeface="Aptos"/>
+              </a:rPr>
+              <a:t>30+</a:t>
+            </a:r>
+            <a:endParaRPr lang="ru-RU" sz="2100"/>
+          </a:p>
+        </p:txBody>
+      </p:sp>
+      <p:sp>
+        <p:nvSpPr>
+          <p:cNvPr id="20" name="artifact card 5"/>
+          <p:cNvSpPr/>
+          <p:nvPr/>
+        </p:nvSpPr>
+        <p:spPr>
+          <a:xfrm>
+            <a:off x="9227668" y="3730752"/>
+            <a:ext cx="1783080" cy="1417320"/>
+          </a:xfrm>
+          <a:prstGeom prst="roundRect">
+            <a:avLst/>
+          </a:prstGeom>
+          <a:solidFill>
+            <a:srgbClr val="FFFFFF"/>
+          </a:solidFill>
+          <a:ln w="9525">
+            <a:solidFill>
+              <a:srgbClr val="0F6B5F"/>
+            </a:solidFill>
+          </a:ln>
+        </p:spPr>
+        <p:txBody>
+          <a:bodyPr wrap="square" anchor="mid" lIns="91440" tIns="91440" rIns="91440" bIns="91440">
+            <a:spAutoFit/>
+          </a:bodyPr>
+          <a:lstStyle/>
+          <a:p>
+            <a:pPr algn="ctr"/>
+            <a:r>
+              <a:rPr lang="ru-RU" sz="900" b="1">
+                <a:solidFill>
+                  <a:srgbClr val="18212B"/>
+                </a:solidFill>
+                <a:latin typeface="Aptos"/>
+                <a:cs typeface="Aptos"/>
+              </a:rPr>
+              <a:t>Алгоритмы обработки</a:t>
+            </a:r>
+            <a:endParaRPr lang="ru-RU" sz="900"/>
+          </a:p>
+          <a:p>
+            <a:pPr algn="ctr"/>
+            <a:r>
+              <a:rPr lang="ru-RU" sz="900" b="1">
+                <a:solidFill>
+                  <a:srgbClr val="18212B"/>
+                </a:solidFill>
+                <a:latin typeface="Aptos"/>
+                <a:cs typeface="Aptos"/>
+              </a:rPr>
+              <a:t>действий UI</a:t>
+            </a:r>
+            <a:endParaRPr lang="ru-RU" sz="900"/>
+          </a:p>
+          <a:p>
+            <a:pPr algn="ctr"/>
+            <a:r>
+              <a:rPr lang="ru-RU" sz="1900" b="1">
+                <a:solidFill>
+                  <a:srgbClr val="0F6B5F"/>
+                </a:solidFill>
+                <a:latin typeface="Aptos"/>
+                <a:cs typeface="Aptos"/>
+              </a:rPr>
+              <a:t>80+</a:t>
+            </a:r>
+            <a:endParaRPr lang="ru-RU" sz="1900"/>
+          </a:p>
+        </p:txBody>
+      </p:sp>
+      <p:sp>
+        <p:nvSpPr>
+          <p:cNvPr id="21" name="footer track"/>
+          <p:cNvSpPr/>
+          <p:nvPr/>
+        </p:nvSpPr>
+        <p:spPr>
+          <a:xfrm>
+            <a:off x="621792" y="6327648"/>
+            <a:ext cx="1417320" cy="45720"/>
+          </a:xfrm>
+          <a:prstGeom prst="roundRect">
+            <a:avLst/>
+          </a:prstGeom>
+          <a:solidFill>
+            <a:srgbClr val="E7ECE8"/>
+          </a:solidFill>
+          <a:ln w="9525">
+            <a:solidFill>
+              <a:srgbClr val=""/>
+            </a:solidFill>
+          </a:ln>
+        </p:spPr>
+      </p:sp>
+      <p:sp>
+        <p:nvSpPr>
+          <p:cNvPr id="22" name="footer progress"/>
+          <p:cNvSpPr/>
+          <p:nvPr/>
+        </p:nvSpPr>
+        <p:spPr>
+          <a:xfrm>
+            <a:off x="621792" y="6327648"/>
+            <a:ext cx="1417320" cy="45720"/>
+          </a:xfrm>
+          <a:prstGeom prst="roundRect">
+            <a:avLst/>
+          </a:prstGeom>
+          <a:solidFill>
+            <a:srgbClr val="D99A2B"/>
+          </a:solidFill>
+          <a:ln w="9525">
+            <a:solidFill>
+              <a:srgbClr val=""/>
+            </a:solidFill>
+          </a:ln>
+        </p:spPr>
+      </p:sp>
+    </p:spTree>
+  </p:cSld>
+  <p:clrMapOvr>
+    <a:masterClrMapping/>
+  </p:clrMapOvr>
+</p:sld>
+</file>
+
 <file path=ppt\theme\theme1.xml><?xml version="1.0" encoding="utf-8"?>
 <a:theme xmlns:a="http://schemas.openxmlformats.org/drawingml/2006/main" name="OpenSpec Adaptation">
   <a:themeElements>
